--- a/PPTs/Ch1_See_Program_Running.pptx
+++ b/PPTs/Ch1_See_Program_Running.pptx
@@ -6160,7 +6160,7 @@
           <a:p>
             <a:r>
               <a:rPr lang="en-US" dirty="0"/>
-              <a:t>See a Program Runs</a:t>
+              <a:t>See a Program Run</a:t>
             </a:r>
           </a:p>
         </p:txBody>
@@ -6536,7 +6536,7 @@
                 <a:rPr lang="pt-BR" dirty="0">
                   <a:latin typeface="Consolas" panose="020B0609020204030204" pitchFamily="49" charset="0"/>
                 </a:rPr>
-                <a:t>MOVS r0, 0x00	</a:t>
+                <a:t xml:space="preserve">MOVS r0, #0x00	</a:t>
               </a:r>
               <a:r>
                 <a:rPr lang="pt-BR" dirty="0">
@@ -8893,7 +8893,7 @@
           <a:p>
             <a:r>
               <a:rPr lang="en-US" dirty="0"/>
-              <a:t>Three-state pipeline: </a:t>
+              <a:t xml:space="preserve">Three-stage pipeline: </a:t>
             </a:r>
             <a:br>
               <a:rPr lang="en-US" dirty="0"/>
@@ -9229,7 +9229,7 @@
           <a:p>
             <a:r>
               <a:rPr lang="en-US" dirty="0"/>
-              <a:t>Three-state pipeline: </a:t>
+              <a:t xml:space="preserve">Three-stage pipeline: </a:t>
             </a:r>
             <a:br>
               <a:rPr lang="en-US" dirty="0"/>
@@ -11938,20 +11938,20 @@
           <a:p>
             <a:r>
               <a:rPr lang="en-US" dirty="0"/>
-              <a:t>Fetch Instruction: pc = </a:t>
+              <a:t xml:space="preserve">Fetch Instruction: pc = </a:t>
             </a:r>
             <a:r>
               <a:rPr lang="en-US" dirty="0">
                 <a:latin typeface="Consolas" panose="020B0609020204030204" pitchFamily="49" charset="0"/>
               </a:rPr>
-              <a:t>0x08001AC</a:t>
+              <a:t>0x080001AC</a:t>
             </a:r>
             <a:br>
               <a:rPr lang="en-US" dirty="0"/>
             </a:br>
             <a:r>
               <a:rPr lang="en-US" dirty="0"/>
-              <a:t>Decode Instruction: </a:t>
+              <a:t xml:space="preserve">Decode Instruction: </a:t>
             </a:r>
             <a:r>
               <a:rPr lang="en-US" dirty="0">
@@ -11961,7 +11961,7 @@
             </a:r>
             <a:r>
               <a:rPr lang="en-US" dirty="0"/>
-              <a:t> = </a:t>
+              <a:t xml:space="preserve"> = </a:t>
             </a:r>
             <a:r>
               <a:rPr lang="en-US" dirty="0">
@@ -11970,7 +11970,7 @@
                 </a:solidFill>
                 <a:latin typeface="Consolas" panose="020B0609020204030204" pitchFamily="49" charset="0"/>
               </a:rPr>
-              <a:t>MOVS r1, #0x00 </a:t>
+              <a:t xml:space="preserve">MOVS r1, #0x00 </a:t>
             </a:r>
           </a:p>
         </p:txBody>
@@ -22154,7 +22154,7 @@
           <a:p>
             <a:r>
               <a:rPr lang="en-US" sz="2000" dirty="0"/>
-              <a:t>Public company, Headquarter at Cambridge, England, UK,  2023 Revenue: US$2.68 billion</a:t>
+              <a:t xml:space="preserve">Public company, Headquarters at Cambridge, England, UK,  2023 Revenue: US$2.68 billion</a:t>
             </a:r>
           </a:p>
           <a:p>
@@ -27301,7 +27301,7 @@
           <a:p>
             <a:r>
               <a:rPr lang="en-US" dirty="0"/>
-              <a:t>Fetch Next Instruction: </a:t>
+              <a:t xml:space="preserve">Fetch Next Instruction: </a:t>
             </a:r>
             <a:r>
               <a:rPr lang="en-US" dirty="0">
@@ -27314,13 +27314,13 @@
             </a:br>
             <a:r>
               <a:rPr lang="en-US" dirty="0"/>
-              <a:t>Decode &amp; Decode: </a:t>
+              <a:t xml:space="preserve">Decode &amp; Execute: </a:t>
             </a:r>
             <a:r>
               <a:rPr lang="en-US" dirty="0">
                 <a:latin typeface="Consolas" panose="020B0609020204030204" pitchFamily="49" charset="0"/>
               </a:rPr>
-              <a:t>4770 = </a:t>
+              <a:t xml:space="preserve">4770 = </a:t>
             </a:r>
             <a:r>
               <a:rPr lang="en-US" dirty="0">
@@ -27329,7 +27329,7 @@
                 </a:solidFill>
                 <a:latin typeface="Consolas" panose="020B0609020204030204" pitchFamily="49" charset="0"/>
               </a:rPr>
-              <a:t>BX </a:t>
+              <a:t xml:space="preserve">BX </a:t>
             </a:r>
             <a:r>
               <a:rPr lang="en-US" dirty="0" err="1">
@@ -42769,7 +42769,7 @@
                   <a:latin typeface="Consolas" panose="020B0609020204030204" pitchFamily="49" charset="0"/>
                   <a:cs typeface="Consolas" panose="020B0609020204030204" pitchFamily="49" charset="0"/>
                 </a:rPr>
-                <a:t>1101110011111011</a:t>
+                <a:t>1101101111111011</a:t>
               </a:r>
             </a:p>
             <a:p>
